--- a/dataset/guides_final/NET/manual/IT-NET-001-M_VPN 접속 장애 처리 매뉴얼.pptx
+++ b/dataset/guides_final/NET/manual/IT-NET-001-M_VPN 접속 장애 처리 매뉴얼.pptx
@@ -22308,7 +22308,7 @@
                 <a:ea typeface="Malgun Gothic"/>
                 <a:cs typeface="Malgun Gothic"/>
               </a:rPr>
-              <a:t>티켓: 담당자 조치가 필요한 건. 담당팀에 배정하고 상태를 RDY → IP → FIN → CLS 으로 관리한다.</a:t>
+              <a:t>티켓: 담당자 조치가 필요한 건. 담당팀에 배정하고 상태를 RDY → WIP → FIN → CLS 으로 관리한다.</a:t>
             </a:r>
           </a:p>
         </p:txBody>

--- a/dataset/guides_final/NET/manual/IT-NET-001-M_VPN 접속 장애 처리 매뉴얼.pptx
+++ b/dataset/guides_final/NET/manual/IT-NET-001-M_VPN 접속 장애 처리 매뉴얼.pptx
@@ -3234,7 +3234,7 @@
                 <a:ea typeface="Malgun Gothic"/>
                 <a:cs typeface="Malgun Gothic"/>
               </a:rPr>
-              <a:t>한화시스템 ICT IT 담당자 매뉴얼 · VPN·네트워크</a:t>
+              <a:t>가상 ICT 기업 IT 담당자 매뉴얼 · VPN·네트워크</a:t>
             </a:r>
           </a:p>
         </p:txBody>
@@ -3513,7 +3513,7 @@
                 <a:ea typeface="Malgun Gothic"/>
                 <a:cs typeface="Malgun Gothic"/>
               </a:rPr>
-              <a:t>© HANWHA SYSTEMS ICT · IT-NET-001-M · 사내 제한</a:t>
+              <a:t>© 가상 ICT 기업 · IT-NET-001-M · 사내 제한</a:t>
             </a:r>
           </a:p>
         </p:txBody>
@@ -4642,7 +4642,7 @@
                 <a:ea typeface="Malgun Gothic"/>
                 <a:cs typeface="Malgun Gothic"/>
               </a:rPr>
-              <a:t>© HANWHA SYSTEMS ICT · IT-NET-001-M · 사내 제한</a:t>
+              <a:t>© 가상 ICT 기업 · IT-NET-001-M · 사내 제한</a:t>
             </a:r>
           </a:p>
         </p:txBody>
@@ -7189,7 +7189,7 @@
                 <a:ea typeface="Malgun Gothic"/>
                 <a:cs typeface="Malgun Gothic"/>
               </a:rPr>
-              <a:t>© HANWHA SYSTEMS ICT · IT-NET-001-M · 사내 제한</a:t>
+              <a:t>© 가상 ICT 기업 · IT-NET-001-M · 사내 제한</a:t>
             </a:r>
           </a:p>
         </p:txBody>
@@ -8412,7 +8412,7 @@
                 <a:ea typeface="Malgun Gothic"/>
                 <a:cs typeface="Malgun Gothic"/>
               </a:rPr>
-              <a:t>© HANWHA SYSTEMS ICT · IT-NET-001-M · 사내 제한</a:t>
+              <a:t>© 가상 ICT 기업 · IT-NET-001-M · 사내 제한</a:t>
             </a:r>
           </a:p>
         </p:txBody>
@@ -10769,7 +10769,7 @@
                 <a:ea typeface="Malgun Gothic"/>
                 <a:cs typeface="Malgun Gothic"/>
               </a:rPr>
-              <a:t>© HANWHA SYSTEMS ICT · IT-NET-001-M · 사내 제한</a:t>
+              <a:t>© 가상 ICT 기업 · IT-NET-001-M · 사내 제한</a:t>
             </a:r>
           </a:p>
         </p:txBody>
@@ -11992,7 +11992,7 @@
                 <a:ea typeface="Malgun Gothic"/>
                 <a:cs typeface="Malgun Gothic"/>
               </a:rPr>
-              <a:t>© HANWHA SYSTEMS ICT · IT-NET-001-M · 사내 제한</a:t>
+              <a:t>© 가상 ICT 기업 · IT-NET-001-M · 사내 제한</a:t>
             </a:r>
           </a:p>
         </p:txBody>
@@ -12240,7 +12240,7 @@
                 <a:ea typeface="Malgun Gothic"/>
                 <a:cs typeface="Malgun Gothic"/>
               </a:rPr>
-              <a:t>© HANWHA SYSTEMS ICT · IT-NET-001-M · 사내 제한</a:t>
+              <a:t>© 가상 ICT 기업 · IT-NET-001-M · 사내 제한</a:t>
             </a:r>
           </a:p>
         </p:txBody>
@@ -12923,7 +12923,7 @@
                 <a:ea typeface="Malgun Gothic"/>
                 <a:cs typeface="Malgun Gothic"/>
               </a:rPr>
-              <a:t>© HANWHA SYSTEMS ICT · IT-NET-001-M · 사내 제한</a:t>
+              <a:t>© 가상 ICT 기업 · IT-NET-001-M · 사내 제한</a:t>
             </a:r>
           </a:p>
         </p:txBody>
@@ -13171,7 +13171,7 @@
                 <a:ea typeface="Malgun Gothic"/>
                 <a:cs typeface="Malgun Gothic"/>
               </a:rPr>
-              <a:t>© HANWHA SYSTEMS ICT · IT-NET-001-M · 사내 제한</a:t>
+              <a:t>© 가상 ICT 기업 · IT-NET-001-M · 사내 제한</a:t>
             </a:r>
           </a:p>
         </p:txBody>
@@ -14199,7 +14199,7 @@
                 <a:ea typeface="Malgun Gothic"/>
                 <a:cs typeface="Malgun Gothic"/>
               </a:rPr>
-              <a:t>© HANWHA SYSTEMS ICT · IT-NET-001-M · 사내 제한</a:t>
+              <a:t>© 가상 ICT 기업 · IT-NET-001-M · 사내 제한</a:t>
             </a:r>
           </a:p>
         </p:txBody>
@@ -14447,7 +14447,7 @@
                 <a:ea typeface="Malgun Gothic"/>
                 <a:cs typeface="Malgun Gothic"/>
               </a:rPr>
-              <a:t>© HANWHA SYSTEMS ICT · IT-NET-001-M · 사내 제한</a:t>
+              <a:t>© 가상 ICT 기업 · IT-NET-001-M · 사내 제한</a:t>
             </a:r>
           </a:p>
         </p:txBody>
@@ -16090,7 +16090,7 @@
                 <a:ea typeface="Malgun Gothic"/>
                 <a:cs typeface="Malgun Gothic"/>
               </a:rPr>
-              <a:t>© HANWHA SYSTEMS ICT · IT-NET-001-M · 사내 제한</a:t>
+              <a:t>© 가상 ICT 기업 · IT-NET-001-M · 사내 제한</a:t>
             </a:r>
           </a:p>
         </p:txBody>
@@ -16670,7 +16670,7 @@
                 <a:ea typeface="Malgun Gothic"/>
                 <a:cs typeface="Malgun Gothic"/>
               </a:rPr>
-              <a:t>© HANWHA SYSTEMS ICT · IT-NET-001-M · 사내 제한</a:t>
+              <a:t>© 가상 ICT 기업 · IT-NET-001-M · 사내 제한</a:t>
             </a:r>
           </a:p>
         </p:txBody>
@@ -17647,7 +17647,7 @@
                 <a:ea typeface="Malgun Gothic"/>
                 <a:cs typeface="Malgun Gothic"/>
               </a:rPr>
-              <a:t>© HANWHA SYSTEMS ICT · IT-NET-001-M · 사내 제한</a:t>
+              <a:t>© 가상 ICT 기업 · IT-NET-001-M · 사내 제한</a:t>
             </a:r>
           </a:p>
         </p:txBody>
@@ -18793,7 +18793,7 @@
                 <a:ea typeface="Malgun Gothic"/>
                 <a:cs typeface="Malgun Gothic"/>
               </a:rPr>
-              <a:t>© HANWHA SYSTEMS ICT · IT-NET-001-M · 사내 제한</a:t>
+              <a:t>© 가상 ICT 기업 · IT-NET-001-M · 사내 제한</a:t>
             </a:r>
           </a:p>
         </p:txBody>
@@ -19041,7 +19041,7 @@
                 <a:ea typeface="Malgun Gothic"/>
                 <a:cs typeface="Malgun Gothic"/>
               </a:rPr>
-              <a:t>© HANWHA SYSTEMS ICT · IT-NET-001-M · 사내 제한</a:t>
+              <a:t>© 가상 ICT 기업 · IT-NET-001-M · 사내 제한</a:t>
             </a:r>
           </a:p>
         </p:txBody>
@@ -19963,7 +19963,7 @@
                 <a:ea typeface="Malgun Gothic"/>
                 <a:cs typeface="Malgun Gothic"/>
               </a:rPr>
-              <a:t>© HANWHA SYSTEMS ICT · IT-NET-001-M · 사내 제한</a:t>
+              <a:t>© 가상 ICT 기업 · IT-NET-001-M · 사내 제한</a:t>
             </a:r>
           </a:p>
         </p:txBody>
@@ -20211,7 +20211,7 @@
                 <a:ea typeface="Malgun Gothic"/>
                 <a:cs typeface="Malgun Gothic"/>
               </a:rPr>
-              <a:t>© HANWHA SYSTEMS ICT · IT-NET-001-M · 사내 제한</a:t>
+              <a:t>© 가상 ICT 기업 · IT-NET-001-M · 사내 제한</a:t>
             </a:r>
           </a:p>
         </p:txBody>
@@ -22684,7 +22684,7 @@
                 <a:ea typeface="Malgun Gothic"/>
                 <a:cs typeface="Malgun Gothic"/>
               </a:rPr>
-              <a:t>© HANWHA SYSTEMS ICT · IT-NET-001-M · 사내 제한</a:t>
+              <a:t>© 가상 ICT 기업 · IT-NET-001-M · 사내 제한</a:t>
             </a:r>
           </a:p>
         </p:txBody>
@@ -22932,7 +22932,7 @@
                 <a:ea typeface="Malgun Gothic"/>
                 <a:cs typeface="Malgun Gothic"/>
               </a:rPr>
-              <a:t>© HANWHA SYSTEMS ICT · IT-NET-001-M · 사내 제한</a:t>
+              <a:t>© 가상 ICT 기업 · IT-NET-001-M · 사내 제한</a:t>
             </a:r>
           </a:p>
         </p:txBody>
@@ -25503,7 +25503,7 @@
                 <a:ea typeface="Malgun Gothic"/>
                 <a:cs typeface="Malgun Gothic"/>
               </a:rPr>
-              <a:t>© HANWHA SYSTEMS ICT · IT-NET-001-M · 사내 제한</a:t>
+              <a:t>© 가상 ICT 기업 · IT-NET-001-M · 사내 제한</a:t>
             </a:r>
           </a:p>
         </p:txBody>
